--- a/tests/fixtures/sample.pptx
+++ b/tests/fixtures/sample.pptx
@@ -14,6 +14,8 @@
     <p:sldId id="259" r:id="rId13"/>
     <p:sldId id="260" r:id="rId14"/>
     <p:sldId id="261" r:id="rId15"/>
+    <p:sldId id="262" r:id="rId16"/>
+    <p:sldId id="263" r:id="rId17"/>
   </p:sldIdLst>
   <p:sldSz cx="12192000" cy="6858000"/>
   <p:notesSz cx="6858000" cy="12192000"/>
@@ -25,6 +27,813 @@
     </a:lvl1pPr>
   </p:defaultTextStyle>
 </p:presentation>
+</file>
+
+<file path=ppt/charts/chart1.xml><?xml version="1.0" encoding="utf-8"?>
+<c:chartSpace xmlns:c="http://schemas.openxmlformats.org/drawingml/2006/chart" xmlns:a="http://schemas.openxmlformats.org/drawingml/2006/main" xmlns:r="http://schemas.openxmlformats.org/officeDocument/2006/relationships">
+  <c:chart>
+    <c:title>
+      <c:tx>
+        <c:rich>
+          <a:bodyPr/>
+          <a:lstStyle/>
+          <a:p>
+            <a:r>
+              <a:rPr lang="en-US" sz="1200" b="1"/>
+              <a:t>Quarterly revenue</a:t>
+            </a:r>
+          </a:p>
+        </c:rich>
+      </c:tx>
+      <c:overlay val="0"/>
+    </c:title>
+    <c:autoTitleDeleted val="0"/>
+    <c:plotArea>
+      <c:layout/>
+      <c:barChart>
+        <c:barDir val="col"/>
+        <c:grouping val="clustered"/>
+        <c:varyColors val="0"/>
+        <c:ser>
+          <c:idx val="0"/>
+          <c:order val="0"/>
+          <c:tx>
+            <c:strRef>
+              <c:f>Sheet1!$B$1</c:f>
+              <c:strCache>
+                <c:ptCount val="1"/>
+                <c:pt idx="0">
+                  <c:v>2024</c:v>
+                </c:pt>
+              </c:strCache>
+            </c:strRef>
+          </c:tx>
+          <c:cat>
+            <c:strRef>
+              <c:f>Sheet1!$A$2:$A$5</c:f>
+              <c:strCache>
+                <c:ptCount val="4"/>
+                <c:pt idx="0">
+                  <c:v>Q1</c:v>
+                </c:pt>
+                <c:pt idx="1">
+                  <c:v>Q2</c:v>
+                </c:pt>
+                <c:pt idx="2">
+                  <c:v>Q3</c:v>
+                </c:pt>
+                <c:pt idx="3">
+                  <c:v>Q4</c:v>
+                </c:pt>
+              </c:strCache>
+            </c:strRef>
+          </c:cat>
+          <c:val>
+            <c:numRef>
+              <c:f>Sheet1!$B$2</c:f>
+              <c:numCache>
+                <c:formatCode>General</c:formatCode>
+                <c:ptCount val="4"/>
+                <c:pt idx="0">
+                  <c:v>32</c:v>
+                </c:pt>
+                <c:pt idx="1">
+                  <c:v>41</c:v>
+                </c:pt>
+                <c:pt idx="2">
+                  <c:v>38</c:v>
+                </c:pt>
+                <c:pt idx="3">
+                  <c:v>55</c:v>
+                </c:pt>
+              </c:numCache>
+            </c:numRef>
+          </c:val>
+        </c:ser>
+        <c:ser>
+          <c:idx val="1"/>
+          <c:order val="1"/>
+          <c:tx>
+            <c:strRef>
+              <c:f>Sheet1!$C$1</c:f>
+              <c:strCache>
+                <c:ptCount val="1"/>
+                <c:pt idx="0">
+                  <c:v>2025</c:v>
+                </c:pt>
+              </c:strCache>
+            </c:strRef>
+          </c:tx>
+          <c:cat>
+            <c:strRef>
+              <c:f>Sheet1!$A$2:$A$5</c:f>
+              <c:strCache>
+                <c:ptCount val="4"/>
+                <c:pt idx="0">
+                  <c:v>Q1</c:v>
+                </c:pt>
+                <c:pt idx="1">
+                  <c:v>Q2</c:v>
+                </c:pt>
+                <c:pt idx="2">
+                  <c:v>Q3</c:v>
+                </c:pt>
+                <c:pt idx="3">
+                  <c:v>Q4</c:v>
+                </c:pt>
+              </c:strCache>
+            </c:strRef>
+          </c:cat>
+          <c:val>
+            <c:numRef>
+              <c:f>Sheet1!$C$2</c:f>
+              <c:numCache>
+                <c:formatCode>General</c:formatCode>
+                <c:ptCount val="4"/>
+                <c:pt idx="0">
+                  <c:v>45</c:v>
+                </c:pt>
+                <c:pt idx="1">
+                  <c:v>39</c:v>
+                </c:pt>
+                <c:pt idx="2">
+                  <c:v>52</c:v>
+                </c:pt>
+                <c:pt idx="3">
+                  <c:v>68</c:v>
+                </c:pt>
+              </c:numCache>
+            </c:numRef>
+          </c:val>
+        </c:ser>
+        <c:overlap val="-27"/>
+        <c:gapWidth val="150"/>
+        <c:axId val="111111111"/>
+        <c:axId val="222222222"/>
+      </c:barChart>
+      <c:catAx>
+        <c:axId val="111111111"/>
+        <c:scaling>
+          <c:orientation val="minMax"/>
+        </c:scaling>
+        <c:delete val="0"/>
+        <c:axPos val="b"/>
+        <c:crossAx val="222222222"/>
+      </c:catAx>
+      <c:valAx>
+        <c:axId val="222222222"/>
+        <c:scaling>
+          <c:orientation val="minMax"/>
+        </c:scaling>
+        <c:delete val="0"/>
+        <c:axPos val="l"/>
+        <c:crossAx val="111111111"/>
+      </c:valAx>
+    </c:plotArea>
+    <c:legend>
+      <c:legendPos val="b"/>
+      <c:overlay val="0"/>
+    </c:legend>
+    <c:plotVisOnly val="1"/>
+  </c:chart>
+</c:chartSpace>
+</file>
+
+<file path=ppt/charts/chart2.xml><?xml version="1.0" encoding="utf-8"?>
+<c:chartSpace xmlns:c="http://schemas.openxmlformats.org/drawingml/2006/chart" xmlns:a="http://schemas.openxmlformats.org/drawingml/2006/main" xmlns:r="http://schemas.openxmlformats.org/officeDocument/2006/relationships">
+  <c:chart>
+    <c:title>
+      <c:tx>
+        <c:rich>
+          <a:bodyPr/>
+          <a:lstStyle/>
+          <a:p>
+            <a:r>
+              <a:rPr lang="en-US" sz="1200" b="1"/>
+              <a:t>Where the time goes</a:t>
+            </a:r>
+          </a:p>
+        </c:rich>
+      </c:tx>
+      <c:overlay val="0"/>
+    </c:title>
+    <c:autoTitleDeleted val="0"/>
+    <c:plotArea>
+      <c:layout/>
+      <c:pieChart>
+        <c:varyColors val="1"/>
+        <c:ser>
+          <c:idx val="0"/>
+          <c:order val="0"/>
+          <c:tx>
+            <c:strRef>
+              <c:f>Sheet1!$B$1</c:f>
+              <c:strCache>
+                <c:ptCount val="1"/>
+                <c:pt idx="0">
+                  <c:v>Share</c:v>
+                </c:pt>
+              </c:strCache>
+            </c:strRef>
+          </c:tx>
+          <c:dPt>
+            <c:idx val="0"/>
+            <c:bubble3D val="0"/>
+            <c:spPr>
+              <a:solidFill>
+                <a:schemeClr val="accent1"/>
+              </a:solidFill>
+            </c:spPr>
+          </c:dPt>
+          <c:dPt>
+            <c:idx val="1"/>
+            <c:bubble3D val="0"/>
+            <c:spPr>
+              <a:solidFill>
+                <a:schemeClr val="accent2"/>
+              </a:solidFill>
+            </c:spPr>
+          </c:dPt>
+          <c:dPt>
+            <c:idx val="2"/>
+            <c:bubble3D val="0"/>
+            <c:spPr>
+              <a:solidFill>
+                <a:schemeClr val="accent3"/>
+              </a:solidFill>
+            </c:spPr>
+          </c:dPt>
+          <c:dPt>
+            <c:idx val="3"/>
+            <c:bubble3D val="0"/>
+            <c:spPr>
+              <a:solidFill>
+                <a:schemeClr val="accent4"/>
+              </a:solidFill>
+            </c:spPr>
+          </c:dPt>
+          <c:cat>
+            <c:strRef>
+              <c:f>Sheet1!$A$2</c:f>
+              <c:strCache>
+                <c:ptCount val="4"/>
+                <c:pt idx="0">
+                  <c:v>Parsing</c:v>
+                </c:pt>
+                <c:pt idx="1">
+                  <c:v>Rendering</c:v>
+                </c:pt>
+                <c:pt idx="2">
+                  <c:v>Editing</c:v>
+                </c:pt>
+                <c:pt idx="3">
+                  <c:v>Saving</c:v>
+                </c:pt>
+              </c:strCache>
+            </c:strRef>
+          </c:cat>
+          <c:val>
+            <c:numRef>
+              <c:f>Sheet1!$B$2</c:f>
+              <c:numCache>
+                <c:formatCode>General</c:formatCode>
+                <c:ptCount val="4"/>
+                <c:pt idx="0">
+                  <c:v>42</c:v>
+                </c:pt>
+                <c:pt idx="1">
+                  <c:v>27</c:v>
+                </c:pt>
+                <c:pt idx="2">
+                  <c:v>21</c:v>
+                </c:pt>
+                <c:pt idx="3">
+                  <c:v>10</c:v>
+                </c:pt>
+              </c:numCache>
+            </c:numRef>
+          </c:val>
+        </c:ser>
+        <c:firstSliceAng val="0"/>
+      </c:pieChart>
+    </c:plotArea>
+    <c:legend>
+      <c:legendPos val="r"/>
+      <c:overlay val="0"/>
+    </c:legend>
+    <c:plotVisOnly val="1"/>
+  </c:chart>
+</c:chartSpace>
+</file>
+
+<file path=ppt/charts/chart3.xml><?xml version="1.0" encoding="utf-8"?>
+<c:chartSpace xmlns:c="http://schemas.openxmlformats.org/drawingml/2006/chart" xmlns:a="http://schemas.openxmlformats.org/drawingml/2006/main" xmlns:r="http://schemas.openxmlformats.org/officeDocument/2006/relationships">
+  <c:chart>
+    <c:title>
+      <c:tx>
+        <c:rich>
+          <a:bodyPr/>
+          <a:lstStyle/>
+          <a:p>
+            <a:r>
+              <a:rPr lang="en-US" sz="1200" b="1"/>
+              <a:t>Weekly active users</a:t>
+            </a:r>
+          </a:p>
+        </c:rich>
+      </c:tx>
+      <c:overlay val="0"/>
+    </c:title>
+    <c:autoTitleDeleted val="0"/>
+    <c:plotArea>
+      <c:layout/>
+      <c:lineChart>
+        <c:grouping val="standard"/>
+        <c:varyColors val="0"/>
+        <c:ser>
+          <c:idx val="0"/>
+          <c:order val="0"/>
+          <c:tx>
+            <c:strRef>
+              <c:f>Sheet1!$B$1</c:f>
+              <c:strCache>
+                <c:ptCount val="1"/>
+                <c:pt idx="0">
+                  <c:v>This week</c:v>
+                </c:pt>
+              </c:strCache>
+            </c:strRef>
+          </c:tx>
+          <c:cat>
+            <c:strRef>
+              <c:f>Sheet1!$A$2:$A$8</c:f>
+              <c:strCache>
+                <c:ptCount val="7"/>
+                <c:pt idx="0">
+                  <c:v>Mon</c:v>
+                </c:pt>
+                <c:pt idx="1">
+                  <c:v>Tue</c:v>
+                </c:pt>
+                <c:pt idx="2">
+                  <c:v>Wed</c:v>
+                </c:pt>
+                <c:pt idx="3">
+                  <c:v>Thu</c:v>
+                </c:pt>
+                <c:pt idx="4">
+                  <c:v>Fri</c:v>
+                </c:pt>
+                <c:pt idx="5">
+                  <c:v>Sat</c:v>
+                </c:pt>
+                <c:pt idx="6">
+                  <c:v>Sun</c:v>
+                </c:pt>
+              </c:strCache>
+            </c:strRef>
+          </c:cat>
+          <c:val>
+            <c:numRef>
+              <c:f>Sheet1!$B$2</c:f>
+              <c:numCache>
+                <c:formatCode>General</c:formatCode>
+                <c:ptCount val="7"/>
+                <c:pt idx="0">
+                  <c:v>120</c:v>
+                </c:pt>
+                <c:pt idx="1">
+                  <c:v>138</c:v>
+                </c:pt>
+                <c:pt idx="2">
+                  <c:v>131</c:v>
+                </c:pt>
+                <c:pt idx="3">
+                  <c:v>152</c:v>
+                </c:pt>
+                <c:pt idx="4">
+                  <c:v>166</c:v>
+                </c:pt>
+                <c:pt idx="5">
+                  <c:v>90</c:v>
+                </c:pt>
+                <c:pt idx="6">
+                  <c:v>74</c:v>
+                </c:pt>
+              </c:numCache>
+            </c:numRef>
+          </c:val>
+        </c:ser>
+        <c:ser>
+          <c:idx val="1"/>
+          <c:order val="1"/>
+          <c:tx>
+            <c:strRef>
+              <c:f>Sheet1!$C$1</c:f>
+              <c:strCache>
+                <c:ptCount val="1"/>
+                <c:pt idx="0">
+                  <c:v>Last week</c:v>
+                </c:pt>
+              </c:strCache>
+            </c:strRef>
+          </c:tx>
+          <c:cat>
+            <c:strRef>
+              <c:f>Sheet1!$A$2:$A$8</c:f>
+              <c:strCache>
+                <c:ptCount val="7"/>
+                <c:pt idx="0">
+                  <c:v>Mon</c:v>
+                </c:pt>
+                <c:pt idx="1">
+                  <c:v>Tue</c:v>
+                </c:pt>
+                <c:pt idx="2">
+                  <c:v>Wed</c:v>
+                </c:pt>
+                <c:pt idx="3">
+                  <c:v>Thu</c:v>
+                </c:pt>
+                <c:pt idx="4">
+                  <c:v>Fri</c:v>
+                </c:pt>
+                <c:pt idx="5">
+                  <c:v>Sat</c:v>
+                </c:pt>
+                <c:pt idx="6">
+                  <c:v>Sun</c:v>
+                </c:pt>
+              </c:strCache>
+            </c:strRef>
+          </c:cat>
+          <c:val>
+            <c:numRef>
+              <c:f>Sheet1!$C$2</c:f>
+              <c:numCache>
+                <c:formatCode>General</c:formatCode>
+                <c:ptCount val="7"/>
+                <c:pt idx="0">
+                  <c:v>104</c:v>
+                </c:pt>
+                <c:pt idx="1">
+                  <c:v>119</c:v>
+                </c:pt>
+                <c:pt idx="2">
+                  <c:v/>
+                </c:pt>
+                <c:pt idx="3">
+                  <c:v>133</c:v>
+                </c:pt>
+                <c:pt idx="4">
+                  <c:v>141</c:v>
+                </c:pt>
+                <c:pt idx="5">
+                  <c:v>82</c:v>
+                </c:pt>
+                <c:pt idx="6">
+                  <c:v>69</c:v>
+                </c:pt>
+              </c:numCache>
+            </c:numRef>
+          </c:val>
+        </c:ser>
+        <c:marker val="1"/>
+        <c:axId val="111111111"/>
+        <c:axId val="222222222"/>
+      </c:lineChart>
+      <c:catAx>
+        <c:axId val="111111111"/>
+        <c:scaling>
+          <c:orientation val="minMax"/>
+        </c:scaling>
+        <c:delete val="0"/>
+        <c:axPos val="b"/>
+        <c:crossAx val="222222222"/>
+      </c:catAx>
+      <c:valAx>
+        <c:axId val="222222222"/>
+        <c:scaling>
+          <c:orientation val="minMax"/>
+        </c:scaling>
+        <c:delete val="0"/>
+        <c:axPos val="l"/>
+        <c:crossAx val="111111111"/>
+      </c:valAx>
+    </c:plotArea>
+    <c:legend>
+      <c:legendPos val="b"/>
+      <c:overlay val="0"/>
+    </c:legend>
+    <c:plotVisOnly val="1"/>
+  </c:chart>
+</c:chartSpace>
+</file>
+
+<file path=ppt/charts/chart4.xml><?xml version="1.0" encoding="utf-8"?>
+<c:chartSpace xmlns:c="http://schemas.openxmlformats.org/drawingml/2006/chart" xmlns:a="http://schemas.openxmlformats.org/drawingml/2006/main" xmlns:r="http://schemas.openxmlformats.org/officeDocument/2006/relationships">
+  <c:chart>
+    <c:title>
+      <c:tx>
+        <c:rich>
+          <a:bodyPr/>
+          <a:lstStyle/>
+          <a:p>
+            <a:r>
+              <a:rPr lang="en-US" sz="1200" b="1"/>
+              <a:t>Effort by area</a:t>
+            </a:r>
+          </a:p>
+        </c:rich>
+      </c:tx>
+      <c:overlay val="0"/>
+    </c:title>
+    <c:autoTitleDeleted val="0"/>
+    <c:plotArea>
+      <c:layout/>
+      <c:barChart>
+        <c:barDir val="bar"/>
+        <c:grouping val="stacked"/>
+        <c:varyColors val="0"/>
+        <c:ser>
+          <c:idx val="0"/>
+          <c:order val="0"/>
+          <c:tx>
+            <c:strRef>
+              <c:f>Sheet1!$B$1</c:f>
+              <c:strCache>
+                <c:ptCount val="1"/>
+                <c:pt idx="0">
+                  <c:v>Design</c:v>
+                </c:pt>
+              </c:strCache>
+            </c:strRef>
+          </c:tx>
+          <c:cat>
+            <c:strRef>
+              <c:f>Sheet1!$A$2:$A$4</c:f>
+              <c:strCache>
+                <c:ptCount val="3"/>
+                <c:pt idx="0">
+                  <c:v>Parser</c:v>
+                </c:pt>
+                <c:pt idx="1">
+                  <c:v>Renderer</c:v>
+                </c:pt>
+                <c:pt idx="2">
+                  <c:v>Editor</c:v>
+                </c:pt>
+              </c:strCache>
+            </c:strRef>
+          </c:cat>
+          <c:val>
+            <c:numRef>
+              <c:f>Sheet1!$B$2</c:f>
+              <c:numCache>
+                <c:formatCode>General</c:formatCode>
+                <c:ptCount val="3"/>
+                <c:pt idx="0">
+                  <c:v>12</c:v>
+                </c:pt>
+                <c:pt idx="1">
+                  <c:v>8</c:v>
+                </c:pt>
+                <c:pt idx="2">
+                  <c:v>14</c:v>
+                </c:pt>
+              </c:numCache>
+            </c:numRef>
+          </c:val>
+        </c:ser>
+        <c:ser>
+          <c:idx val="1"/>
+          <c:order val="1"/>
+          <c:tx>
+            <c:strRef>
+              <c:f>Sheet1!$C$1</c:f>
+              <c:strCache>
+                <c:ptCount val="1"/>
+                <c:pt idx="0">
+                  <c:v>Build</c:v>
+                </c:pt>
+              </c:strCache>
+            </c:strRef>
+          </c:tx>
+          <c:cat>
+            <c:strRef>
+              <c:f>Sheet1!$A$2:$A$4</c:f>
+              <c:strCache>
+                <c:ptCount val="3"/>
+                <c:pt idx="0">
+                  <c:v>Parser</c:v>
+                </c:pt>
+                <c:pt idx="1">
+                  <c:v>Renderer</c:v>
+                </c:pt>
+                <c:pt idx="2">
+                  <c:v>Editor</c:v>
+                </c:pt>
+              </c:strCache>
+            </c:strRef>
+          </c:cat>
+          <c:val>
+            <c:numRef>
+              <c:f>Sheet1!$C$2</c:f>
+              <c:numCache>
+                <c:formatCode>General</c:formatCode>
+                <c:ptCount val="3"/>
+                <c:pt idx="0">
+                  <c:v>30</c:v>
+                </c:pt>
+                <c:pt idx="1">
+                  <c:v>26</c:v>
+                </c:pt>
+                <c:pt idx="2">
+                  <c:v>41</c:v>
+                </c:pt>
+              </c:numCache>
+            </c:numRef>
+          </c:val>
+        </c:ser>
+        <c:ser>
+          <c:idx val="2"/>
+          <c:order val="2"/>
+          <c:tx>
+            <c:strRef>
+              <c:f>Sheet1!$D$1</c:f>
+              <c:strCache>
+                <c:ptCount val="1"/>
+                <c:pt idx="0">
+                  <c:v>Test</c:v>
+                </c:pt>
+              </c:strCache>
+            </c:strRef>
+          </c:tx>
+          <c:cat>
+            <c:strRef>
+              <c:f>Sheet1!$A$2:$A$4</c:f>
+              <c:strCache>
+                <c:ptCount val="3"/>
+                <c:pt idx="0">
+                  <c:v>Parser</c:v>
+                </c:pt>
+                <c:pt idx="1">
+                  <c:v>Renderer</c:v>
+                </c:pt>
+                <c:pt idx="2">
+                  <c:v>Editor</c:v>
+                </c:pt>
+              </c:strCache>
+            </c:strRef>
+          </c:cat>
+          <c:val>
+            <c:numRef>
+              <c:f>Sheet1!$D$2</c:f>
+              <c:numCache>
+                <c:formatCode>General</c:formatCode>
+                <c:ptCount val="3"/>
+                <c:pt idx="0">
+                  <c:v>9</c:v>
+                </c:pt>
+                <c:pt idx="1">
+                  <c:v>11</c:v>
+                </c:pt>
+                <c:pt idx="2">
+                  <c:v>16</c:v>
+                </c:pt>
+              </c:numCache>
+            </c:numRef>
+          </c:val>
+        </c:ser>
+        <c:overlap val="100"/>
+        <c:gapWidth val="150"/>
+        <c:axId val="111111111"/>
+        <c:axId val="222222222"/>
+      </c:barChart>
+      <c:catAx>
+        <c:axId val="111111111"/>
+        <c:scaling>
+          <c:orientation val="minMax"/>
+        </c:scaling>
+        <c:delete val="0"/>
+        <c:axPos val="b"/>
+        <c:crossAx val="222222222"/>
+      </c:catAx>
+      <c:valAx>
+        <c:axId val="222222222"/>
+        <c:scaling>
+          <c:orientation val="minMax"/>
+        </c:scaling>
+        <c:delete val="0"/>
+        <c:axPos val="l"/>
+        <c:crossAx val="111111111"/>
+      </c:valAx>
+    </c:plotArea>
+    <c:legend>
+      <c:legendPos val="b"/>
+      <c:overlay val="0"/>
+    </c:legend>
+    <c:plotVisOnly val="1"/>
+  </c:chart>
+</c:chartSpace>
+</file>
+
+<file path=ppt/charts/chart5.xml><?xml version="1.0" encoding="utf-8"?>
+<c:chartSpace xmlns:c="http://schemas.openxmlformats.org/drawingml/2006/chart" xmlns:a="http://schemas.openxmlformats.org/drawingml/2006/main" xmlns:r="http://schemas.openxmlformats.org/officeDocument/2006/relationships">
+  <c:chart>
+    <c:title>
+      <c:tx>
+        <c:rich>
+          <a:bodyPr/>
+          <a:lstStyle/>
+          <a:p>
+            <a:r>
+              <a:rPr lang="en-US" sz="1200" b="1"/>
+              <a:t>Coverage</a:t>
+            </a:r>
+          </a:p>
+        </c:rich>
+      </c:tx>
+      <c:overlay val="0"/>
+    </c:title>
+    <c:autoTitleDeleted val="0"/>
+    <c:plotArea>
+      <c:layout/>
+      <c:doughnutChart>
+        <c:varyColors val="1"/>
+        <c:ser>
+          <c:idx val="0"/>
+          <c:order val="0"/>
+          <c:tx>
+            <c:strRef>
+              <c:f>Sheet1!$B$1</c:f>
+              <c:strCache>
+                <c:ptCount val="1"/>
+                <c:pt idx="0">
+                  <c:v>Share</c:v>
+                </c:pt>
+              </c:strCache>
+            </c:strRef>
+          </c:tx>
+          <c:dPt>
+            <c:idx val="0"/>
+            <c:bubble3D val="0"/>
+            <c:spPr>
+              <a:solidFill>
+                <a:schemeClr val="accent1"/>
+              </a:solidFill>
+            </c:spPr>
+          </c:dPt>
+          <c:dPt>
+            <c:idx val="1"/>
+            <c:bubble3D val="0"/>
+            <c:spPr>
+              <a:solidFill>
+                <a:schemeClr val="accent2"/>
+              </a:solidFill>
+            </c:spPr>
+          </c:dPt>
+          <c:cat>
+            <c:strRef>
+              <c:f>Sheet1!$A$2</c:f>
+              <c:strCache>
+                <c:ptCount val="2"/>
+                <c:pt idx="0">
+                  <c:v>Done</c:v>
+                </c:pt>
+                <c:pt idx="1">
+                  <c:v>Left</c:v>
+                </c:pt>
+              </c:strCache>
+            </c:strRef>
+          </c:cat>
+          <c:val>
+            <c:numRef>
+              <c:f>Sheet1!$B$2</c:f>
+              <c:numCache>
+                <c:formatCode>General</c:formatCode>
+                <c:ptCount val="2"/>
+                <c:pt idx="0">
+                  <c:v>78</c:v>
+                </c:pt>
+                <c:pt idx="1">
+                  <c:v>22</c:v>
+                </c:pt>
+              </c:numCache>
+            </c:numRef>
+          </c:val>
+        </c:ser>
+        <c:firstSliceAng val="0"/>
+        <c:holeSize val="55"/>
+      </c:doughnutChart>
+    </c:plotArea>
+    <c:legend>
+      <c:legendPos val="r"/>
+      <c:overlay val="0"/>
+    </c:legend>
+    <c:plotVisOnly val="1"/>
+  </c:chart>
+</c:chartSpace>
 </file>
 
 <file path=ppt/notesMasters/notesMaster1.xml><?xml version="1.0" encoding="utf-8"?>
@@ -74,7 +883,7 @@
       </p:grpSpPr>
       <p:sp>
         <p:nvSpPr>
-          <p:cNvPr id="136" name="Notes Placeholder"/>
+          <p:cNvPr id="145" name="Notes Placeholder"/>
           <p:cNvSpPr/>
           <p:nvPr>
             <p:ph type="body" idx="1"/>
@@ -2076,6 +2885,252 @@
                 </a:solidFill>
               </a:rPr>
               <a:t>This slide has speaker notes — press N to see them.</a:t>
+            </a:r>
+          </a:p>
+        </p:txBody>
+      </p:sp>
+    </p:spTree>
+  </p:cSld>
+  <p:clrMapOvr>
+    <a:masterClrMapping/>
+  </p:clrMapOvr>
+</p:sld>
+</file>
+
+<file path=ppt/slides/slide7.xml><?xml version="1.0" encoding="utf-8"?>
+<p:sld xmlns:a="http://schemas.openxmlformats.org/drawingml/2006/main" xmlns:r="http://schemas.openxmlformats.org/officeDocument/2006/relationships" xmlns:p="http://schemas.openxmlformats.org/presentationml/2006/main">
+  <p:cSld>
+    <p:spTree>
+      <p:nvGrpSpPr>
+        <p:cNvPr id="1" name=""/>
+        <p:cNvGrpSpPr/>
+        <p:nvPr/>
+      </p:nvGrpSpPr>
+      <p:grpSpPr>
+        <a:xfrm>
+          <a:off x="0" y="0"/>
+          <a:ext cx="0" cy="0"/>
+          <a:chOff x="0" y="0"/>
+          <a:chExt cx="0" cy="0"/>
+        </a:xfrm>
+      </p:grpSpPr>
+      <p:sp>
+        <p:nvSpPr>
+          <p:cNvPr id="136" name="Title"/>
+          <p:cNvSpPr/>
+          <p:nvPr>
+            <p:ph type="title"/>
+          </p:nvPr>
+        </p:nvSpPr>
+        <p:spPr>
+          <a:prstGeom prst="rect">
+            <a:avLst/>
+          </a:prstGeom>
+        </p:spPr>
+        <p:txBody>
+          <a:bodyPr anchor="b"/>
+          <a:lstStyle/>
+          <a:p>
+            <a:r>
+              <a:rPr lang="en-US"/>
+              <a:t>Charts</a:t>
+            </a:r>
+          </a:p>
+        </p:txBody>
+      </p:sp>
+      <p:graphicFrame>
+        <p:nvGraphicFramePr>
+          <p:cNvPr id="137" name="Column chart"/>
+          <p:cNvGraphicFramePr/>
+          <p:nvPr/>
+        </p:nvGraphicFramePr>
+        <p:xfrm>
+          <a:off x="762000" y="1619250"/>
+          <a:ext cx="5334000" cy="3238500"/>
+        </p:xfrm>
+        <a:graphic>
+          <a:graphicData uri="http://schemas.openxmlformats.org/drawingml/2006/chart">
+            <c:chart xmlns:c="http://schemas.openxmlformats.org/drawingml/2006/chart" xmlns:r="http://schemas.openxmlformats.org/officeDocument/2006/relationships" r:id="rId2"/>
+          </a:graphicData>
+        </a:graphic>
+      </p:graphicFrame>
+      <p:graphicFrame>
+        <p:nvGraphicFramePr>
+          <p:cNvPr id="138" name="Pie chart"/>
+          <p:cNvGraphicFramePr/>
+          <p:nvPr/>
+        </p:nvGraphicFramePr>
+        <p:xfrm>
+          <a:off x="6477000" y="1619250"/>
+          <a:ext cx="4953000" cy="3238500"/>
+        </p:xfrm>
+        <a:graphic>
+          <a:graphicData uri="http://schemas.openxmlformats.org/drawingml/2006/chart">
+            <c:chart xmlns:c="http://schemas.openxmlformats.org/drawingml/2006/chart" xmlns:r="http://schemas.openxmlformats.org/officeDocument/2006/relationships" r:id="rId3"/>
+          </a:graphicData>
+        </a:graphic>
+      </p:graphicFrame>
+      <p:sp>
+        <p:nvSpPr>
+          <p:cNvPr id="139" name="Caption"/>
+          <p:cNvSpPr/>
+          <p:nvPr/>
+        </p:nvSpPr>
+        <p:spPr>
+          <a:xfrm>
+            <a:off x="762000" y="5048250"/>
+            <a:ext cx="10668000" cy="381000"/>
+          </a:xfrm>
+          <a:prstGeom prst="rect">
+            <a:avLst/>
+          </a:prstGeom>
+          <a:noFill/>
+        </p:spPr>
+        <p:txBody>
+          <a:bodyPr/>
+          <a:lstStyle/>
+          <a:p>
+            <a:pPr>
+              <a:buNone/>
+            </a:pPr>
+            <a:r>
+              <a:rPr lang="en-US" sz="1500" i="1">
+                <a:solidFill>
+                  <a:srgbClr val="6B7B8C"/>
+                </a:solidFill>
+              </a:rPr>
+              <a:t>Both are drawn from the values cached in the chart part — no workbook needed.</a:t>
+            </a:r>
+          </a:p>
+        </p:txBody>
+      </p:sp>
+    </p:spTree>
+  </p:cSld>
+  <p:clrMapOvr>
+    <a:masterClrMapping/>
+  </p:clrMapOvr>
+</p:sld>
+</file>
+
+<file path=ppt/slides/slide8.xml><?xml version="1.0" encoding="utf-8"?>
+<p:sld xmlns:a="http://schemas.openxmlformats.org/drawingml/2006/main" xmlns:r="http://schemas.openxmlformats.org/officeDocument/2006/relationships" xmlns:p="http://schemas.openxmlformats.org/presentationml/2006/main">
+  <p:cSld>
+    <p:spTree>
+      <p:nvGrpSpPr>
+        <p:cNvPr id="1" name=""/>
+        <p:cNvGrpSpPr/>
+        <p:nvPr/>
+      </p:nvGrpSpPr>
+      <p:grpSpPr>
+        <a:xfrm>
+          <a:off x="0" y="0"/>
+          <a:ext cx="0" cy="0"/>
+          <a:chOff x="0" y="0"/>
+          <a:chExt cx="0" cy="0"/>
+        </a:xfrm>
+      </p:grpSpPr>
+      <p:sp>
+        <p:nvSpPr>
+          <p:cNvPr id="140" name="Title"/>
+          <p:cNvSpPr/>
+          <p:nvPr>
+            <p:ph type="title"/>
+          </p:nvPr>
+        </p:nvSpPr>
+        <p:spPr>
+          <a:prstGeom prst="rect">
+            <a:avLst/>
+          </a:prstGeom>
+        </p:spPr>
+        <p:txBody>
+          <a:bodyPr anchor="b"/>
+          <a:lstStyle/>
+          <a:p>
+            <a:r>
+              <a:rPr lang="en-US"/>
+              <a:t>More chart types</a:t>
+            </a:r>
+          </a:p>
+        </p:txBody>
+      </p:sp>
+      <p:graphicFrame>
+        <p:nvGraphicFramePr>
+          <p:cNvPr id="141" name="Line chart"/>
+          <p:cNvGraphicFramePr/>
+          <p:nvPr/>
+        </p:nvGraphicFramePr>
+        <p:xfrm>
+          <a:off x="762000" y="1619250"/>
+          <a:ext cx="5143500" cy="3143250"/>
+        </p:xfrm>
+        <a:graphic>
+          <a:graphicData uri="http://schemas.openxmlformats.org/drawingml/2006/chart">
+            <c:chart xmlns:c="http://schemas.openxmlformats.org/drawingml/2006/chart" xmlns:r="http://schemas.openxmlformats.org/officeDocument/2006/relationships" r:id="rId2"/>
+          </a:graphicData>
+        </a:graphic>
+      </p:graphicFrame>
+      <p:graphicFrame>
+        <p:nvGraphicFramePr>
+          <p:cNvPr id="142" name="Stacked bar"/>
+          <p:cNvGraphicFramePr/>
+          <p:nvPr/>
+        </p:nvGraphicFramePr>
+        <p:xfrm>
+          <a:off x="6286500" y="1619250"/>
+          <a:ext cx="5143500" cy="3143250"/>
+        </p:xfrm>
+        <a:graphic>
+          <a:graphicData uri="http://schemas.openxmlformats.org/drawingml/2006/chart">
+            <c:chart xmlns:c="http://schemas.openxmlformats.org/drawingml/2006/chart" xmlns:r="http://schemas.openxmlformats.org/officeDocument/2006/relationships" r:id="rId3"/>
+          </a:graphicData>
+        </a:graphic>
+      </p:graphicFrame>
+      <p:graphicFrame>
+        <p:nvGraphicFramePr>
+          <p:cNvPr id="143" name="Doughnut"/>
+          <p:cNvGraphicFramePr/>
+          <p:nvPr/>
+        </p:nvGraphicFramePr>
+        <p:xfrm>
+          <a:off x="762000" y="4953000"/>
+          <a:ext cx="2857500" cy="1428750"/>
+        </p:xfrm>
+        <a:graphic>
+          <a:graphicData uri="http://schemas.openxmlformats.org/drawingml/2006/chart">
+            <c:chart xmlns:c="http://schemas.openxmlformats.org/drawingml/2006/chart" xmlns:r="http://schemas.openxmlformats.org/officeDocument/2006/relationships" r:id="rId4"/>
+          </a:graphicData>
+        </a:graphic>
+      </p:graphicFrame>
+      <p:sp>
+        <p:nvSpPr>
+          <p:cNvPr id="144" name="Caption"/>
+          <p:cNvSpPr/>
+          <p:nvPr/>
+        </p:nvSpPr>
+        <p:spPr>
+          <a:xfrm>
+            <a:off x="4000500" y="5334000"/>
+            <a:ext cx="7429500" cy="571500"/>
+          </a:xfrm>
+          <a:prstGeom prst="rect">
+            <a:avLst/>
+          </a:prstGeom>
+          <a:noFill/>
+        </p:spPr>
+        <p:txBody>
+          <a:bodyPr anchor="ctr"/>
+          <a:lstStyle/>
+          <a:p>
+            <a:pPr>
+              <a:buNone/>
+            </a:pPr>
+            <a:r>
+              <a:rPr lang="en-US" sz="1500" i="1">
+                <a:solidFill>
+                  <a:srgbClr val="6B7B8C"/>
+                </a:solidFill>
+              </a:rPr>
+              <a:t>A line with a gap in the data, a horizontal stacked bar, and a doughnut.</a:t>
             </a:r>
           </a:p>
         </p:txBody>
